--- a/Lesson 2/OrangeEnglish_Lesson2_VocabularyForTrends.pptx
+++ b/Lesson 2/OrangeEnglish_Lesson2_VocabularyForTrends.pptx
@@ -2699,7 +2699,7 @@
                 <a:ea typeface="Inter" pitchFamily="34" charset="-122"/>
                 <a:cs typeface="Inter" pitchFamily="34" charset="-120"/>
               </a:rPr>
-              <a:t>Lesson 2 of 6 · IELTS Writing Task 1 · orangeenglish.nl</a:t>
+              <a:t>Lesson 2 of 8 · IELTS Writing Task 1 · orangeenglish.nl</a:t>
             </a:r>
             <a:endParaRPr lang="en-US" sz="1800" dirty="0"/>
           </a:p>
@@ -3429,7 +3429,7 @@
                 <a:ea typeface="Inter" pitchFamily="34" charset="-122"/>
                 <a:cs typeface="Inter" pitchFamily="34" charset="-120"/>
               </a:rPr>
-              <a:t>Lesson 2 of 6 · IELTS Writing Task 1 · orangeenglish.nl</a:t>
+              <a:t>Lesson 2 of 8 · IELTS Writing Task 1 · orangeenglish.nl</a:t>
             </a:r>
             <a:endParaRPr lang="en-US" sz="1800" dirty="0"/>
           </a:p>
@@ -4491,7 +4491,7 @@
                 <a:ea typeface="Inter" pitchFamily="34" charset="-122"/>
                 <a:cs typeface="Inter" pitchFamily="34" charset="-120"/>
               </a:rPr>
-              <a:t>Lesson 2 of 6 · IELTS Writing Task 1 · orangeenglish.nl</a:t>
+              <a:t>Lesson 2 of 8 · IELTS Writing Task 1 · orangeenglish.nl</a:t>
             </a:r>
             <a:endParaRPr lang="en-US" sz="1800" dirty="0"/>
           </a:p>
@@ -5553,7 +5553,7 @@
                 <a:ea typeface="Inter" pitchFamily="34" charset="-122"/>
                 <a:cs typeface="Inter" pitchFamily="34" charset="-120"/>
               </a:rPr>
-              <a:t>Lesson 2 of 6 · IELTS Writing Task 1 · orangeenglish.nl</a:t>
+              <a:t>Lesson 2 of 8 · IELTS Writing Task 1 · orangeenglish.nl</a:t>
             </a:r>
             <a:endParaRPr lang="en-US" sz="1800" dirty="0"/>
           </a:p>
@@ -6361,7 +6361,7 @@
                 <a:ea typeface="Inter" pitchFamily="34" charset="-122"/>
                 <a:cs typeface="Inter" pitchFamily="34" charset="-120"/>
               </a:rPr>
-              <a:t>Lesson 2 of 6 · IELTS Writing Task 1 · orangeenglish.nl</a:t>
+              <a:t>Lesson 2 of 8 · IELTS Writing Task 1 · orangeenglish.nl</a:t>
             </a:r>
             <a:endParaRPr lang="en-US" sz="1800" dirty="0"/>
           </a:p>
@@ -7680,7 +7680,7 @@
                 <a:ea typeface="Inter" pitchFamily="34" charset="-122"/>
                 <a:cs typeface="Inter" pitchFamily="34" charset="-120"/>
               </a:rPr>
-              <a:t>Lesson 2 of 6 · IELTS Writing Task 1 · orangeenglish.nl</a:t>
+              <a:t>Lesson 2 of 8 · IELTS Writing Task 1 · orangeenglish.nl</a:t>
             </a:r>
             <a:endParaRPr lang="en-US" sz="1800" dirty="0"/>
           </a:p>
@@ -8537,7 +8537,7 @@
                 <a:ea typeface="Inter" pitchFamily="34" charset="-122"/>
                 <a:cs typeface="Inter" pitchFamily="34" charset="-120"/>
               </a:rPr>
-              <a:t>Lesson 2 of 6 · IELTS Writing Task 1 · orangeenglish.nl</a:t>
+              <a:t>Lesson 2 of 8 · IELTS Writing Task 1 · orangeenglish.nl</a:t>
             </a:r>
             <a:endParaRPr lang="en-US" sz="1800" dirty="0"/>
           </a:p>
@@ -9787,7 +9787,7 @@
                 <a:ea typeface="Inter" pitchFamily="34" charset="-122"/>
                 <a:cs typeface="Inter" pitchFamily="34" charset="-120"/>
               </a:rPr>
-              <a:t>Lesson 2 of 6 · IELTS Writing Task 1 · orangeenglish.nl</a:t>
+              <a:t>Lesson 2 of 8 · IELTS Writing Task 1 · orangeenglish.nl</a:t>
             </a:r>
             <a:endParaRPr lang="en-US" sz="1800" dirty="0"/>
           </a:p>
@@ -11144,7 +11144,7 @@
                 <a:ea typeface="Inter" pitchFamily="34" charset="-122"/>
                 <a:cs typeface="Inter" pitchFamily="34" charset="-120"/>
               </a:rPr>
-              <a:t>Lesson 2 of 6 · IELTS Writing Task 1 · orangeenglish.nl</a:t>
+              <a:t>Lesson 2 of 8 · IELTS Writing Task 1 · orangeenglish.nl</a:t>
             </a:r>
             <a:endParaRPr lang="en-US" sz="1800" dirty="0"/>
           </a:p>

--- a/Lesson 2/OrangeEnglish_Lesson2_VocabularyForTrends.pptx
+++ b/Lesson 2/OrangeEnglish_Lesson2_VocabularyForTrends.pptx
@@ -1688,6 +1688,10 @@
           </a:solidFill>
           <a:ln/>
         </p:spPr>
+        <p:txBody>
+          <a:bodyPr/>
+          <a:p/>
+        </p:txBody>
       </p:sp>
       <p:pic>
         <p:nvPicPr>
@@ -2057,6 +2061,10 @@
           </a:solidFill>
           <a:ln/>
         </p:spPr>
+        <p:txBody>
+          <a:bodyPr/>
+          <a:p/>
+        </p:txBody>
       </p:sp>
       <p:pic>
         <p:nvPicPr>
@@ -2209,6 +2217,10 @@
           </a:solidFill>
           <a:ln/>
         </p:spPr>
+        <p:txBody>
+          <a:bodyPr/>
+          <a:p/>
+        </p:txBody>
       </p:sp>
       <p:sp>
         <p:nvSpPr>
@@ -2290,6 +2302,10 @@
           </a:solidFill>
           <a:ln/>
         </p:spPr>
+        <p:txBody>
+          <a:bodyPr/>
+          <a:p/>
+        </p:txBody>
       </p:sp>
       <p:sp>
         <p:nvSpPr>
@@ -2422,6 +2438,10 @@
           </a:solidFill>
           <a:ln/>
         </p:spPr>
+        <p:txBody>
+          <a:bodyPr/>
+          <a:p/>
+        </p:txBody>
       </p:sp>
       <p:sp>
         <p:nvSpPr>
@@ -2520,6 +2540,10 @@
           </a:solidFill>
           <a:ln/>
         </p:spPr>
+        <p:txBody>
+          <a:bodyPr/>
+          <a:p/>
+        </p:txBody>
       </p:sp>
       <p:sp>
         <p:nvSpPr>
@@ -2699,7 +2723,7 @@
                 <a:ea typeface="Inter" pitchFamily="34" charset="-122"/>
                 <a:cs typeface="Inter" pitchFamily="34" charset="-120"/>
               </a:rPr>
-              <a:t>Lesson 2 of 8 · IELTS Writing Task 1 · orangeenglish.nl</a:t>
+              <a:t>Lesson 2 of 6 · IELTS Writing Task 1 · orangeenglish.nl</a:t>
             </a:r>
             <a:endParaRPr lang="en-US" sz="1800" dirty="0"/>
           </a:p>
@@ -2790,6 +2814,10 @@
           </a:solidFill>
           <a:ln/>
         </p:spPr>
+        <p:txBody>
+          <a:bodyPr/>
+          <a:p/>
+        </p:txBody>
       </p:sp>
       <p:pic>
         <p:nvPicPr>
@@ -2917,7 +2945,7 @@
                 <a:ea typeface="Montserrat" pitchFamily="34" charset="-122"/>
                 <a:cs typeface="Montserrat" pitchFamily="34" charset="-120"/>
               </a:rPr>
-              <a:t>One verb can be worth a whole band score.</a:t>
+              <a:t>Precise verbs make your description accurate.</a:t>
             </a:r>
             <a:endParaRPr lang="en-US" sz="4200" dirty="0"/>
           </a:p>
@@ -3429,7 +3457,7 @@
                 <a:ea typeface="Inter" pitchFamily="34" charset="-122"/>
                 <a:cs typeface="Inter" pitchFamily="34" charset="-120"/>
               </a:rPr>
-              <a:t>Lesson 2 of 8 · IELTS Writing Task 1 · orangeenglish.nl</a:t>
+              <a:t>Lesson 2 of 6 · IELTS Writing Task 1 · orangeenglish.nl</a:t>
             </a:r>
             <a:endParaRPr lang="en-US" sz="1800" dirty="0"/>
           </a:p>
@@ -3520,6 +3548,10 @@
           </a:solidFill>
           <a:ln/>
         </p:spPr>
+        <p:txBody>
+          <a:bodyPr/>
+          <a:p/>
+        </p:txBody>
       </p:sp>
       <p:pic>
         <p:nvPicPr>
@@ -3724,6 +3756,10 @@
             <a:prstDash val="solid"/>
           </a:ln>
         </p:spPr>
+        <p:txBody>
+          <a:bodyPr/>
+          <a:p/>
+        </p:txBody>
       </p:sp>
       <p:sp>
         <p:nvSpPr>
@@ -3978,6 +4014,10 @@
             <a:prstDash val="solid"/>
           </a:ln>
         </p:spPr>
+        <p:txBody>
+          <a:bodyPr/>
+          <a:p/>
+        </p:txBody>
       </p:sp>
       <p:sp>
         <p:nvSpPr>
@@ -4232,6 +4272,10 @@
             <a:prstDash val="solid"/>
           </a:ln>
         </p:spPr>
+        <p:txBody>
+          <a:bodyPr/>
+          <a:p/>
+        </p:txBody>
       </p:sp>
       <p:sp>
         <p:nvSpPr>
@@ -4491,7 +4535,7 @@
                 <a:ea typeface="Inter" pitchFamily="34" charset="-122"/>
                 <a:cs typeface="Inter" pitchFamily="34" charset="-120"/>
               </a:rPr>
-              <a:t>Lesson 2 of 8 · IELTS Writing Task 1 · orangeenglish.nl</a:t>
+              <a:t>Lesson 2 of 6 · IELTS Writing Task 1 · orangeenglish.nl</a:t>
             </a:r>
             <a:endParaRPr lang="en-US" sz="1800" dirty="0"/>
           </a:p>
@@ -4582,6 +4626,10 @@
           </a:solidFill>
           <a:ln/>
         </p:spPr>
+        <p:txBody>
+          <a:bodyPr/>
+          <a:p/>
+        </p:txBody>
       </p:sp>
       <p:pic>
         <p:nvPicPr>
@@ -4786,6 +4834,10 @@
             <a:prstDash val="solid"/>
           </a:ln>
         </p:spPr>
+        <p:txBody>
+          <a:bodyPr/>
+          <a:p/>
+        </p:txBody>
       </p:sp>
       <p:sp>
         <p:nvSpPr>
@@ -5040,6 +5092,10 @@
             <a:prstDash val="solid"/>
           </a:ln>
         </p:spPr>
+        <p:txBody>
+          <a:bodyPr/>
+          <a:p/>
+        </p:txBody>
       </p:sp>
       <p:sp>
         <p:nvSpPr>
@@ -5294,6 +5350,10 @@
             <a:prstDash val="solid"/>
           </a:ln>
         </p:spPr>
+        <p:txBody>
+          <a:bodyPr/>
+          <a:p/>
+        </p:txBody>
       </p:sp>
       <p:sp>
         <p:nvSpPr>
@@ -5553,7 +5613,7 @@
                 <a:ea typeface="Inter" pitchFamily="34" charset="-122"/>
                 <a:cs typeface="Inter" pitchFamily="34" charset="-120"/>
               </a:rPr>
-              <a:t>Lesson 2 of 8 · IELTS Writing Task 1 · orangeenglish.nl</a:t>
+              <a:t>Lesson 2 of 6 · IELTS Writing Task 1 · orangeenglish.nl</a:t>
             </a:r>
             <a:endParaRPr lang="en-US" sz="1800" dirty="0"/>
           </a:p>
@@ -5644,6 +5704,10 @@
           </a:solidFill>
           <a:ln/>
         </p:spPr>
+        <p:txBody>
+          <a:bodyPr/>
+          <a:p/>
+        </p:txBody>
       </p:sp>
       <p:pic>
         <p:nvPicPr>
@@ -5807,6 +5871,10 @@
             <a:prstDash val="solid"/>
           </a:ln>
         </p:spPr>
+        <p:txBody>
+          <a:bodyPr/>
+          <a:p/>
+        </p:txBody>
       </p:sp>
       <p:pic>
         <p:nvPicPr>
@@ -6010,6 +6078,10 @@
             <a:prstDash val="solid"/>
           </a:ln>
         </p:spPr>
+        <p:txBody>
+          <a:bodyPr/>
+          <a:p/>
+        </p:txBody>
       </p:sp>
       <p:pic>
         <p:nvPicPr>
@@ -6213,6 +6285,10 @@
             <a:prstDash val="solid"/>
           </a:ln>
         </p:spPr>
+        <p:txBody>
+          <a:bodyPr/>
+          <a:p/>
+        </p:txBody>
       </p:sp>
       <p:sp>
         <p:nvSpPr>
@@ -6361,7 +6437,7 @@
                 <a:ea typeface="Inter" pitchFamily="34" charset="-122"/>
                 <a:cs typeface="Inter" pitchFamily="34" charset="-120"/>
               </a:rPr>
-              <a:t>Lesson 2 of 8 · IELTS Writing Task 1 · orangeenglish.nl</a:t>
+              <a:t>Lesson 2 of 6 · IELTS Writing Task 1 · orangeenglish.nl</a:t>
             </a:r>
             <a:endParaRPr lang="en-US" sz="1800" dirty="0"/>
           </a:p>
@@ -6452,6 +6528,10 @@
           </a:solidFill>
           <a:ln/>
         </p:spPr>
+        <p:txBody>
+          <a:bodyPr/>
+          <a:p/>
+        </p:txBody>
       </p:sp>
       <p:pic>
         <p:nvPicPr>
@@ -6615,6 +6695,10 @@
             <a:prstDash val="solid"/>
           </a:ln>
         </p:spPr>
+        <p:txBody>
+          <a:bodyPr/>
+          <a:p/>
+        </p:txBody>
       </p:sp>
       <p:sp>
         <p:nvSpPr>
@@ -6844,7 +6928,7 @@
                 <a:ea typeface="Inter" pitchFamily="34" charset="-122"/>
                 <a:cs typeface="Inter" pitchFamily="34" charset="-120"/>
               </a:rPr>
-              <a:t>since 2020</a:t>
+              <a:t>in 2020, not since 2020</a:t>
             </a:r>
             <a:endParaRPr lang="en-US" sz="2025" dirty="0"/>
           </a:p>
@@ -6880,6 +6964,10 @@
             <a:prstDash val="solid"/>
           </a:ln>
         </p:spPr>
+        <p:txBody>
+          <a:bodyPr/>
+          <a:p/>
+        </p:txBody>
       </p:sp>
       <p:sp>
         <p:nvSpPr>
@@ -7145,6 +7233,10 @@
             <a:prstDash val="solid"/>
           </a:ln>
         </p:spPr>
+        <p:txBody>
+          <a:bodyPr/>
+          <a:p/>
+        </p:txBody>
       </p:sp>
       <p:sp>
         <p:nvSpPr>
@@ -7374,7 +7466,7 @@
                 <a:ea typeface="Inter" pitchFamily="34" charset="-122"/>
                 <a:cs typeface="Inter" pitchFamily="34" charset="-120"/>
               </a:rPr>
-              <a:t>across the decade</a:t>
+              <a:t>since 2020 (up to now)</a:t>
             </a:r>
             <a:endParaRPr lang="en-US" sz="2025" dirty="0"/>
           </a:p>
@@ -7410,6 +7502,10 @@
             <a:prstDash val="solid"/>
           </a:ln>
         </p:spPr>
+        <p:txBody>
+          <a:bodyPr/>
+          <a:p/>
+        </p:txBody>
       </p:sp>
       <p:sp>
         <p:nvSpPr>
@@ -7680,7 +7776,7 @@
                 <a:ea typeface="Inter" pitchFamily="34" charset="-122"/>
                 <a:cs typeface="Inter" pitchFamily="34" charset="-120"/>
               </a:rPr>
-              <a:t>Lesson 2 of 8 · IELTS Writing Task 1 · orangeenglish.nl</a:t>
+              <a:t>Lesson 2 of 6 · IELTS Writing Task 1 · orangeenglish.nl</a:t>
             </a:r>
             <a:endParaRPr lang="en-US" sz="1800" dirty="0"/>
           </a:p>
@@ -7771,6 +7867,10 @@
           </a:solidFill>
           <a:ln/>
         </p:spPr>
+        <p:txBody>
+          <a:bodyPr/>
+          <a:p/>
+        </p:txBody>
       </p:sp>
       <p:pic>
         <p:nvPicPr>
@@ -7898,7 +7998,7 @@
                 <a:ea typeface="Montserrat" pitchFamily="34" charset="-122"/>
                 <a:cs typeface="Montserrat" pitchFamily="34" charset="-120"/>
               </a:rPr>
-              <a:t>From band 5 to band 7, one sentence.</a:t>
+              <a:t>From vague to precise, one sentence.</a:t>
             </a:r>
             <a:endParaRPr lang="en-US" sz="4200" dirty="0"/>
           </a:p>
@@ -7934,6 +8034,10 @@
             <a:prstDash val="solid"/>
           </a:ln>
         </p:spPr>
+        <p:txBody>
+          <a:bodyPr/>
+          <a:p/>
+        </p:txBody>
       </p:sp>
       <p:sp>
         <p:nvSpPr>
@@ -8132,6 +8236,10 @@
             <a:prstDash val="solid"/>
           </a:ln>
         </p:spPr>
+        <p:txBody>
+          <a:bodyPr/>
+          <a:p/>
+        </p:txBody>
       </p:sp>
       <p:sp>
         <p:nvSpPr>
@@ -8217,14 +8325,14 @@
       </p:sp>
       <p:sp>
         <p:nvSpPr>
-          <p:cNvPr id="15" name="Text 11"/>
+          <p:cNvPr id="20" name="Text 15"/>
           <p:cNvSpPr/>
           <p:nvPr/>
         </p:nvSpPr>
         <p:spPr>
           <a:xfrm>
             <a:off x="1666875" y="6192366"/>
-            <a:ext cx="3692904" cy="452438"/>
+            <a:ext cx="14277860" cy="949598"/>
           </a:xfrm>
           <a:prstGeom prst="rect">
             <a:avLst/>
@@ -8253,69 +8361,11 @@
                 <a:ea typeface="Inter" pitchFamily="34" charset="-122"/>
                 <a:cs typeface="Inter" pitchFamily="34" charset="-120"/>
               </a:rPr>
-              <a:t>"The number of users</a:t>
+              <a:t>"The number of users </a:t>
             </a:r>
             <a:endParaRPr lang="en-US" sz="2700" dirty="0"/>
-          </a:p>
-        </p:txBody>
-      </p:sp>
-      <p:pic>
-        <p:nvPicPr>
-          <p:cNvPr id="16" name="Image 2" descr="preencoded.png">    </p:cNvPr>
-          <p:cNvPicPr>
-            <a:picLocks noChangeAspect="1"/>
-          </p:cNvPicPr>
-          <p:nvPr/>
-        </p:nvPicPr>
-        <p:blipFill>
-          <a:blip r:embed="rId3">
-            <a:alphaModFix amt="95000"/>
-          </a:blip>
-          <a:stretch>
-            <a:fillRect/>
-          </a:stretch>
-        </p:blipFill>
-        <p:spPr>
-          <a:xfrm>
-            <a:off x="5267399" y="6154266"/>
-            <a:ext cx="3011760" cy="516210"/>
-          </a:xfrm>
-          <a:prstGeom prst="rect">
-            <a:avLst/>
-          </a:prstGeom>
-        </p:spPr>
-      </p:pic>
-      <p:sp>
-        <p:nvSpPr>
-          <p:cNvPr id="17" name="Text 12"/>
-          <p:cNvSpPr/>
-          <p:nvPr/>
-        </p:nvSpPr>
-        <p:spPr>
-          <a:xfrm>
-            <a:off x="5343599" y="6192366"/>
-            <a:ext cx="3145296" cy="452438"/>
-          </a:xfrm>
-          <a:prstGeom prst="rect">
-            <a:avLst/>
-          </a:prstGeom>
-          <a:noFill/>
-          <a:ln/>
-        </p:spPr>
-        <p:txBody>
-          <a:bodyPr wrap="none" lIns="25400" tIns="25400" rIns="25400" bIns="25400" rtlCol="0" anchor="t">
-            <a:normAutofit/>
-          </a:bodyPr>
-          <a:lstStyle/>
-          <a:p>
-            <a:pPr algn="l" indent="0" marL="0">
-              <a:lnSpc>
-                <a:spcPct val="145000"/>
-              </a:lnSpc>
-              <a:buNone/>
-            </a:pPr>
-            <a:r>
-              <a:rPr lang="en-US" sz="2700" b="1" dirty="0">
+            <a:r>
+              <a:rPr lang="en-US" sz="2700" dirty="0" b="1">
                 <a:solidFill>
                   <a:srgbClr val="292929"/>
                 </a:solidFill>
@@ -8325,39 +8375,6 @@
               </a:rPr>
               <a:t>rose dramatically</a:t>
             </a:r>
-            <a:endParaRPr lang="en-US" sz="2700" dirty="0"/>
-          </a:p>
-        </p:txBody>
-      </p:sp>
-      <p:sp>
-        <p:nvSpPr>
-          <p:cNvPr id="18" name="Text 13"/>
-          <p:cNvSpPr/>
-          <p:nvPr/>
-        </p:nvSpPr>
-        <p:spPr>
-          <a:xfrm>
-            <a:off x="8202960" y="6192366"/>
-            <a:ext cx="2519437" cy="452438"/>
-          </a:xfrm>
-          <a:prstGeom prst="rect">
-            <a:avLst/>
-          </a:prstGeom>
-          <a:noFill/>
-          <a:ln/>
-        </p:spPr>
-        <p:txBody>
-          <a:bodyPr wrap="square" lIns="0" tIns="0" rIns="0" bIns="0" rtlCol="0" anchor="t">
-            <a:normAutofit/>
-          </a:bodyPr>
-          <a:lstStyle/>
-          <a:p>
-            <a:pPr algn="l" indent="0" marL="0">
-              <a:lnSpc>
-                <a:spcPct val="145000"/>
-              </a:lnSpc>
-              <a:buNone/>
-            </a:pPr>
             <a:r>
               <a:rPr lang="en-US" sz="2700" dirty="0">
                 <a:solidFill>
@@ -8367,43 +8384,10 @@
                 <a:ea typeface="Inter" pitchFamily="34" charset="-122"/>
                 <a:cs typeface="Inter" pitchFamily="34" charset="-120"/>
               </a:rPr>
-              <a:t>, climbing from</a:t>
-            </a:r>
-            <a:endParaRPr lang="en-US" sz="2700" dirty="0"/>
-          </a:p>
-        </p:txBody>
-      </p:sp>
-      <p:sp>
-        <p:nvSpPr>
-          <p:cNvPr id="19" name="Text 14"/>
-          <p:cNvSpPr/>
-          <p:nvPr/>
-        </p:nvSpPr>
-        <p:spPr>
-          <a:xfrm>
-            <a:off x="10737577" y="6192366"/>
-            <a:ext cx="3604424" cy="452438"/>
-          </a:xfrm>
-          <a:prstGeom prst="rect">
-            <a:avLst/>
-          </a:prstGeom>
-          <a:noFill/>
-          <a:ln/>
-        </p:spPr>
-        <p:txBody>
-          <a:bodyPr wrap="square" lIns="25400" tIns="25400" rIns="25400" bIns="25400" rtlCol="0" anchor="t">
-            <a:normAutofit/>
-          </a:bodyPr>
-          <a:lstStyle/>
-          <a:p>
-            <a:pPr algn="l" indent="0" marL="0">
-              <a:lnSpc>
-                <a:spcPct val="145000"/>
-              </a:lnSpc>
-              <a:buNone/>
-            </a:pPr>
-            <a:r>
-              <a:rPr lang="en-US" sz="2700" b="1" dirty="0">
+              <a:t>, climbing from </a:t>
+            </a:r>
+            <a:r>
+              <a:rPr lang="en-US" sz="2700" dirty="0" b="1">
                 <a:solidFill>
                   <a:srgbClr val="292929"/>
                 </a:solidFill>
@@ -8413,39 +8397,6 @@
               </a:rPr>
               <a:t>2 million to 9 million</a:t>
             </a:r>
-            <a:endParaRPr lang="en-US" sz="2700" dirty="0"/>
-          </a:p>
-        </p:txBody>
-      </p:sp>
-      <p:sp>
-        <p:nvSpPr>
-          <p:cNvPr id="20" name="Text 15"/>
-          <p:cNvSpPr/>
-          <p:nvPr/>
-        </p:nvSpPr>
-        <p:spPr>
-          <a:xfrm>
-            <a:off x="1666875" y="6192366"/>
-            <a:ext cx="14277860" cy="949598"/>
-          </a:xfrm>
-          <a:prstGeom prst="rect">
-            <a:avLst/>
-          </a:prstGeom>
-          <a:noFill/>
-          <a:ln/>
-        </p:spPr>
-        <p:txBody>
-          <a:bodyPr wrap="square" lIns="0" tIns="0" rIns="0" bIns="0" rtlCol="0" anchor="t">
-            <a:normAutofit/>
-          </a:bodyPr>
-          <a:lstStyle/>
-          <a:p>
-            <a:pPr algn="l" indent="0" marL="0">
-              <a:lnSpc>
-                <a:spcPct val="145000"/>
-              </a:lnSpc>
-              <a:buNone/>
-            </a:pPr>
             <a:r>
               <a:rPr lang="en-US" sz="2700" dirty="0">
                 <a:solidFill>
@@ -8455,9 +8406,8 @@
                 <a:ea typeface="Inter" pitchFamily="34" charset="-122"/>
                 <a:cs typeface="Inter" pitchFamily="34" charset="-120"/>
               </a:rPr>
-              <a:t>between 2010 and 2020."</a:t>
-            </a:r>
-            <a:endParaRPr lang="en-US" sz="2700" dirty="0"/>
+              <a:t> between 2010 and 2020."</a:t>
+            </a:r>
           </a:p>
         </p:txBody>
       </p:sp>
@@ -8496,7 +8446,7 @@
                 <a:ea typeface="Caveat" pitchFamily="34" charset="-122"/>
                 <a:cs typeface="Caveat" pitchFamily="34" charset="-120"/>
               </a:rPr>
-              <a:t>varied verb + exact figures included</a:t>
+              <a:t>precise verb + exact figures + clear time period</a:t>
             </a:r>
             <a:endParaRPr lang="en-US" sz="2250" dirty="0"/>
           </a:p>
@@ -8537,7 +8487,7 @@
                 <a:ea typeface="Inter" pitchFamily="34" charset="-122"/>
                 <a:cs typeface="Inter" pitchFamily="34" charset="-120"/>
               </a:rPr>
-              <a:t>Lesson 2 of 8 · IELTS Writing Task 1 · orangeenglish.nl</a:t>
+              <a:t>Lesson 2 of 6 · IELTS Writing Task 1 · orangeenglish.nl</a:t>
             </a:r>
             <a:endParaRPr lang="en-US" sz="1800" dirty="0"/>
           </a:p>
@@ -8628,6 +8578,10 @@
           </a:solidFill>
           <a:ln/>
         </p:spPr>
+        <p:txBody>
+          <a:bodyPr/>
+          <a:p/>
+        </p:txBody>
       </p:sp>
       <p:pic>
         <p:nvPicPr>
@@ -8840,7 +8794,7 @@
                 <a:ea typeface="Inter" pitchFamily="34" charset="-122"/>
                 <a:cs typeface="Inter" pitchFamily="34" charset="-120"/>
               </a:rPr>
-              <a:t>Decide whether each word describes an increase, a decrease, or stability.</a:t>
+              <a:t>Decide which type of movement each word describes. One word fits none of the three boxes: it is a fourth type.</a:t>
             </a:r>
             <a:endParaRPr lang="en-US" sz="2250" dirty="0"/>
           </a:p>
@@ -8867,6 +8821,10 @@
           </a:solidFill>
           <a:ln/>
         </p:spPr>
+        <p:txBody>
+          <a:bodyPr/>
+          <a:p/>
+        </p:txBody>
       </p:sp>
       <p:sp>
         <p:nvSpPr>
@@ -8930,6 +8888,10 @@
           </a:solidFill>
           <a:ln/>
         </p:spPr>
+        <p:txBody>
+          <a:bodyPr/>
+          <a:p/>
+        </p:txBody>
       </p:sp>
       <p:sp>
         <p:nvSpPr>
@@ -8993,6 +8955,10 @@
           </a:solidFill>
           <a:ln/>
         </p:spPr>
+        <p:txBody>
+          <a:bodyPr/>
+          <a:p/>
+        </p:txBody>
       </p:sp>
       <p:sp>
         <p:nvSpPr>
@@ -9056,6 +9022,10 @@
           </a:solidFill>
           <a:ln/>
         </p:spPr>
+        <p:txBody>
+          <a:bodyPr/>
+          <a:p/>
+        </p:txBody>
       </p:sp>
       <p:sp>
         <p:nvSpPr>
@@ -9119,6 +9089,10 @@
           </a:solidFill>
           <a:ln/>
         </p:spPr>
+        <p:txBody>
+          <a:bodyPr/>
+          <a:p/>
+        </p:txBody>
       </p:sp>
       <p:sp>
         <p:nvSpPr>
@@ -9182,6 +9156,10 @@
           </a:solidFill>
           <a:ln/>
         </p:spPr>
+        <p:txBody>
+          <a:bodyPr/>
+          <a:p/>
+        </p:txBody>
       </p:sp>
       <p:sp>
         <p:nvSpPr>
@@ -9245,6 +9223,10 @@
           </a:solidFill>
           <a:ln/>
         </p:spPr>
+        <p:txBody>
+          <a:bodyPr/>
+          <a:p/>
+        </p:txBody>
       </p:sp>
       <p:sp>
         <p:nvSpPr>
@@ -9308,6 +9290,10 @@
           </a:solidFill>
           <a:ln/>
         </p:spPr>
+        <p:txBody>
+          <a:bodyPr/>
+          <a:p/>
+        </p:txBody>
       </p:sp>
       <p:sp>
         <p:nvSpPr>
@@ -9371,6 +9357,10 @@
           </a:solidFill>
           <a:ln/>
         </p:spPr>
+        <p:txBody>
+          <a:bodyPr/>
+          <a:p/>
+        </p:txBody>
       </p:sp>
       <p:sp>
         <p:nvSpPr>
@@ -9525,6 +9515,10 @@
             <a:prstDash val="dash"/>
           </a:ln>
         </p:spPr>
+        <p:txBody>
+          <a:bodyPr/>
+          <a:p/>
+        </p:txBody>
       </p:sp>
       <p:sp>
         <p:nvSpPr>
@@ -9638,6 +9632,10 @@
             <a:prstDash val="dash"/>
           </a:ln>
         </p:spPr>
+        <p:txBody>
+          <a:bodyPr/>
+          <a:p/>
+        </p:txBody>
       </p:sp>
       <p:sp>
         <p:nvSpPr>
@@ -9751,6 +9749,10 @@
             <a:prstDash val="dash"/>
           </a:ln>
         </p:spPr>
+        <p:txBody>
+          <a:bodyPr/>
+          <a:p/>
+        </p:txBody>
       </p:sp>
       <p:sp>
         <p:nvSpPr>
@@ -9787,7 +9789,7 @@
                 <a:ea typeface="Inter" pitchFamily="34" charset="-122"/>
                 <a:cs typeface="Inter" pitchFamily="34" charset="-120"/>
               </a:rPr>
-              <a:t>Lesson 2 of 8 · IELTS Writing Task 1 · orangeenglish.nl</a:t>
+              <a:t>Lesson 2 of 6 · IELTS Writing Task 1 · orangeenglish.nl</a:t>
             </a:r>
             <a:endParaRPr lang="en-US" sz="1800" dirty="0"/>
           </a:p>
@@ -9878,6 +9880,10 @@
           </a:solidFill>
           <a:ln/>
         </p:spPr>
+        <p:txBody>
+          <a:bodyPr/>
+          <a:p/>
+        </p:txBody>
       </p:sp>
       <p:pic>
         <p:nvPicPr>
@@ -10090,7 +10096,7 @@
                 <a:ea typeface="Inter" pitchFamily="34" charset="-122"/>
                 <a:cs typeface="Inter" pitchFamily="34" charset="-120"/>
               </a:rPr>
-              <a:t>Three describe direction, two describe stability, and one fits none of them.</a:t>
+              <a:t>There are four types of movement: increase, decrease, stability and fluctuation.</a:t>
             </a:r>
             <a:endParaRPr lang="en-US" sz="2250" dirty="0"/>
           </a:p>
@@ -10208,6 +10214,10 @@
             <a:prstDash val="solid"/>
           </a:ln>
         </p:spPr>
+        <p:txBody>
+          <a:bodyPr/>
+          <a:p/>
+        </p:txBody>
       </p:sp>
       <p:sp>
         <p:nvSpPr>
@@ -10230,6 +10240,10 @@
           </a:solidFill>
           <a:ln/>
         </p:spPr>
+        <p:txBody>
+          <a:bodyPr/>
+          <a:p/>
+        </p:txBody>
       </p:sp>
       <p:sp>
         <p:nvSpPr>
@@ -10293,6 +10307,10 @@
           </a:solidFill>
           <a:ln/>
         </p:spPr>
+        <p:txBody>
+          <a:bodyPr/>
+          <a:p/>
+        </p:txBody>
       </p:sp>
       <p:sp>
         <p:nvSpPr>
@@ -10356,6 +10374,10 @@
           </a:solidFill>
           <a:ln/>
         </p:spPr>
+        <p:txBody>
+          <a:bodyPr/>
+          <a:p/>
+        </p:txBody>
       </p:sp>
       <p:sp>
         <p:nvSpPr>
@@ -10510,6 +10532,10 @@
             <a:prstDash val="solid"/>
           </a:ln>
         </p:spPr>
+        <p:txBody>
+          <a:bodyPr/>
+          <a:p/>
+        </p:txBody>
       </p:sp>
       <p:sp>
         <p:nvSpPr>
@@ -10532,6 +10558,10 @@
           </a:solidFill>
           <a:ln/>
         </p:spPr>
+        <p:txBody>
+          <a:bodyPr/>
+          <a:p/>
+        </p:txBody>
       </p:sp>
       <p:sp>
         <p:nvSpPr>
@@ -10595,6 +10625,10 @@
           </a:solidFill>
           <a:ln/>
         </p:spPr>
+        <p:txBody>
+          <a:bodyPr/>
+          <a:p/>
+        </p:txBody>
       </p:sp>
       <p:sp>
         <p:nvSpPr>
@@ -10658,6 +10692,10 @@
           </a:solidFill>
           <a:ln/>
         </p:spPr>
+        <p:txBody>
+          <a:bodyPr/>
+          <a:p/>
+        </p:txBody>
       </p:sp>
       <p:sp>
         <p:nvSpPr>
@@ -10812,6 +10850,10 @@
             <a:prstDash val="solid"/>
           </a:ln>
         </p:spPr>
+        <p:txBody>
+          <a:bodyPr/>
+          <a:p/>
+        </p:txBody>
       </p:sp>
       <p:sp>
         <p:nvSpPr>
@@ -10834,6 +10876,10 @@
           </a:solidFill>
           <a:ln/>
         </p:spPr>
+        <p:txBody>
+          <a:bodyPr/>
+          <a:p/>
+        </p:txBody>
       </p:sp>
       <p:sp>
         <p:nvSpPr>
@@ -10897,6 +10943,10 @@
           </a:solidFill>
           <a:ln/>
         </p:spPr>
+        <p:txBody>
+          <a:bodyPr/>
+          <a:p/>
+        </p:txBody>
       </p:sp>
       <p:sp>
         <p:nvSpPr>
@@ -10962,6 +11012,10 @@
           </a:solidFill>
           <a:ln/>
         </p:spPr>
+        <p:txBody>
+          <a:bodyPr/>
+          <a:p/>
+        </p:txBody>
       </p:sp>
       <p:sp>
         <p:nvSpPr>
@@ -10989,6 +11043,10 @@
             <a:prstDash val="solid"/>
           </a:ln>
         </p:spPr>
+        <p:txBody>
+          <a:bodyPr/>
+          <a:p/>
+        </p:txBody>
       </p:sp>
       <p:sp>
         <p:nvSpPr>
@@ -11069,7 +11127,7 @@
                 <a:ea typeface="Inter" pitchFamily="34" charset="-122"/>
                 <a:cs typeface="Inter" pitchFamily="34" charset="-120"/>
               </a:rPr>
-              <a:t>the trick word, it describes </a:t>
+              <a:t>the fourth type: </a:t>
             </a:r>
             <a:pPr algn="l" indent="0" marL="0">
               <a:lnSpc>
@@ -11086,7 +11144,7 @@
                 <a:ea typeface="Inter" pitchFamily="34" charset="-122"/>
                 <a:cs typeface="Inter" pitchFamily="34" charset="-120"/>
               </a:rPr>
-              <a:t>fluctuation </a:t>
+              <a:t>fluctuation</a:t>
             </a:r>
             <a:pPr algn="l" indent="0" marL="0">
               <a:lnSpc>
@@ -11103,7 +11161,7 @@
                 <a:ea typeface="Inter" pitchFamily="34" charset="-122"/>
                 <a:cs typeface="Inter" pitchFamily="34" charset="-120"/>
               </a:rPr>
-              <a:t>and belongs to none of the three.</a:t>
+              <a:t>. The line goes up and down repeatedly, with no single direction.</a:t>
             </a:r>
             <a:endParaRPr lang="en-US" sz="2025" dirty="0"/>
           </a:p>
@@ -11144,7 +11202,7 @@
                 <a:ea typeface="Inter" pitchFamily="34" charset="-122"/>
                 <a:cs typeface="Inter" pitchFamily="34" charset="-120"/>
               </a:rPr>
-              <a:t>Lesson 2 of 8 · IELTS Writing Task 1 · orangeenglish.nl</a:t>
+              <a:t>Lesson 2 of 6 · IELTS Writing Task 1 · orangeenglish.nl</a:t>
             </a:r>
             <a:endParaRPr lang="en-US" sz="1800" dirty="0"/>
           </a:p>
